--- a/lecture_pptx/out/s17/ワーク01.pptx
+++ b/lecture_pptx/out/s17/ワーク01.pptx
@@ -2279,7 +2279,7 @@
         <p:spPr>
           <a:xfrm>
             <a:off x="365760" y="1188720"/>
-            <a:ext cx="1979676" cy="2468880"/>
+            <a:ext cx="1979676" cy="3017520"/>
           </a:xfrm>
           <a:prstGeom prst="roundRect">
             <a:avLst>
@@ -2386,8 +2386,8 @@
         </p:nvSpPr>
         <p:spPr>
           <a:xfrm>
-            <a:off x="530352" y="1901952"/>
-            <a:ext cx="1650492" cy="1645920"/>
+            <a:off x="530352" y="1938528"/>
+            <a:ext cx="1650492" cy="2148840"/>
           </a:xfrm>
           <a:prstGeom prst="rect">
             <a:avLst/>
@@ -2401,12 +2401,12 @@
           <a:p>
             <a:pPr indent="0" marL="0">
               <a:spcAft>
-                <a:spcPts val="200"/>
+                <a:spcPts val="600"/>
               </a:spcAft>
               <a:buNone/>
             </a:pPr>
             <a:r>
-              <a:rPr lang="en-US" sz="1300" dirty="0">
+              <a:rPr lang="en-US" sz="1600" dirty="0">
                 <a:solidFill>
                   <a:srgbClr val="1A1A1A"/>
                 </a:solidFill>
@@ -2416,7 +2416,7 @@
               </a:rPr>
               <a:t>今後の人生でかかる費用とリスクを見える化した計画書。</a:t>
             </a:r>
-            <a:endParaRPr lang="en-US" sz="1300" dirty="0"/>
+            <a:endParaRPr lang="en-US" sz="1600" dirty="0"/>
           </a:p>
         </p:txBody>
       </p:sp>
@@ -2429,7 +2429,7 @@
         <p:spPr>
           <a:xfrm>
             <a:off x="2510028" y="1188720"/>
-            <a:ext cx="1979676" cy="2468880"/>
+            <a:ext cx="1979676" cy="3017520"/>
           </a:xfrm>
           <a:prstGeom prst="roundRect">
             <a:avLst>
@@ -2536,8 +2536,8 @@
         </p:nvSpPr>
         <p:spPr>
           <a:xfrm>
-            <a:off x="2674620" y="1901952"/>
-            <a:ext cx="1650492" cy="1645920"/>
+            <a:off x="2674620" y="1938528"/>
+            <a:ext cx="1650492" cy="2148840"/>
           </a:xfrm>
           <a:prstGeom prst="rect">
             <a:avLst/>
@@ -2551,12 +2551,12 @@
           <a:p>
             <a:pPr indent="0" marL="0">
               <a:spcAft>
-                <a:spcPts val="200"/>
+                <a:spcPts val="600"/>
               </a:spcAft>
               <a:buNone/>
             </a:pPr>
             <a:r>
-              <a:rPr lang="en-US" sz="1300" dirty="0">
+              <a:rPr lang="en-US" sz="1600" dirty="0">
                 <a:solidFill>
                   <a:srgbClr val="1A1A1A"/>
                 </a:solidFill>
@@ -2564,9 +2564,26 @@
                 <a:ea typeface="Yu Gothic UI" pitchFamily="34" charset="-122"/>
                 <a:cs typeface="Yu Gothic UI" pitchFamily="34" charset="-120"/>
               </a:rPr>
-              <a:t>ライフプラン作成のために聞く質問群。漏れると見直し不可。</a:t>
-            </a:r>
-            <a:endParaRPr lang="en-US" sz="1300" dirty="0"/>
+              <a:t>ライフプラン作成のために聞く質問群。</a:t>
+            </a:r>
+            <a:pPr indent="0" marL="0">
+              <a:spcAft>
+                <a:spcPts val="600"/>
+              </a:spcAft>
+              <a:buNone/>
+            </a:pPr>
+            <a:r>
+              <a:rPr lang="en-US" sz="1600" dirty="0">
+                <a:solidFill>
+                  <a:srgbClr val="1A1A1A"/>
+                </a:solidFill>
+                <a:latin typeface="Yu Gothic UI" pitchFamily="34" charset="0"/>
+                <a:ea typeface="Yu Gothic UI" pitchFamily="34" charset="-122"/>
+                <a:cs typeface="Yu Gothic UI" pitchFamily="34" charset="-120"/>
+              </a:rPr>
+              <a:t>漏れると見直し不可。</a:t>
+            </a:r>
+            <a:endParaRPr lang="en-US" sz="1600" dirty="0"/>
           </a:p>
         </p:txBody>
       </p:sp>
@@ -2579,7 +2596,7 @@
         <p:spPr>
           <a:xfrm>
             <a:off x="4654296" y="1188720"/>
-            <a:ext cx="1979676" cy="2468880"/>
+            <a:ext cx="1979676" cy="3017520"/>
           </a:xfrm>
           <a:prstGeom prst="roundRect">
             <a:avLst>
@@ -2686,8 +2703,8 @@
         </p:nvSpPr>
         <p:spPr>
           <a:xfrm>
-            <a:off x="4818888" y="1901952"/>
-            <a:ext cx="1650492" cy="1645920"/>
+            <a:off x="4818888" y="1938528"/>
+            <a:ext cx="1650492" cy="2148840"/>
           </a:xfrm>
           <a:prstGeom prst="rect">
             <a:avLst/>
@@ -2701,12 +2718,12 @@
           <a:p>
             <a:pPr indent="0" marL="0">
               <a:spcAft>
-                <a:spcPts val="200"/>
+                <a:spcPts val="600"/>
               </a:spcAft>
               <a:buNone/>
             </a:pPr>
             <a:r>
-              <a:rPr lang="en-US" sz="1300" dirty="0">
+              <a:rPr lang="en-US" sz="1600" dirty="0">
                 <a:solidFill>
                   <a:srgbClr val="1A1A1A"/>
                 </a:solidFill>
@@ -2714,9 +2731,26 @@
                 <a:ea typeface="Yu Gothic UI" pitchFamily="34" charset="-122"/>
                 <a:cs typeface="Yu Gothic UI" pitchFamily="34" charset="-120"/>
               </a:rPr>
-              <a:t>「不安」を金額に変換すること。説得力UPの基本。</a:t>
-            </a:r>
-            <a:endParaRPr lang="en-US" sz="1300" dirty="0"/>
+              <a:t>「不安」を金額に変換すること。</a:t>
+            </a:r>
+            <a:pPr indent="0" marL="0">
+              <a:spcAft>
+                <a:spcPts val="600"/>
+              </a:spcAft>
+              <a:buNone/>
+            </a:pPr>
+            <a:r>
+              <a:rPr lang="en-US" sz="1600" dirty="0">
+                <a:solidFill>
+                  <a:srgbClr val="1A1A1A"/>
+                </a:solidFill>
+                <a:latin typeface="Yu Gothic UI" pitchFamily="34" charset="0"/>
+                <a:ea typeface="Yu Gothic UI" pitchFamily="34" charset="-122"/>
+                <a:cs typeface="Yu Gothic UI" pitchFamily="34" charset="-120"/>
+              </a:rPr>
+              <a:t>説得力UPの基本。</a:t>
+            </a:r>
+            <a:endParaRPr lang="en-US" sz="1600" dirty="0"/>
           </a:p>
         </p:txBody>
       </p:sp>
@@ -2729,7 +2763,7 @@
         <p:spPr>
           <a:xfrm>
             <a:off x="6798564" y="1188720"/>
-            <a:ext cx="1979676" cy="2468880"/>
+            <a:ext cx="1979676" cy="3017520"/>
           </a:xfrm>
           <a:prstGeom prst="roundRect">
             <a:avLst>
@@ -2836,8 +2870,8 @@
         </p:nvSpPr>
         <p:spPr>
           <a:xfrm>
-            <a:off x="6963156" y="1901952"/>
-            <a:ext cx="1650492" cy="1645920"/>
+            <a:off x="6963156" y="1938528"/>
+            <a:ext cx="1650492" cy="2148840"/>
           </a:xfrm>
           <a:prstGeom prst="rect">
             <a:avLst/>
@@ -2851,12 +2885,12 @@
           <a:p>
             <a:pPr indent="0" marL="0">
               <a:spcAft>
-                <a:spcPts val="200"/>
+                <a:spcPts val="600"/>
               </a:spcAft>
               <a:buNone/>
             </a:pPr>
             <a:r>
-              <a:rPr lang="en-US" sz="1300" dirty="0">
+              <a:rPr lang="en-US" sz="1600" dirty="0">
                 <a:solidFill>
                   <a:srgbClr val="1A1A1A"/>
                 </a:solidFill>
@@ -2866,7 +2900,7 @@
               </a:rPr>
               <a:t>基本/家族/資産/不安 など、項目を分類する枠組み。</a:t>
             </a:r>
-            <a:endParaRPr lang="en-US" sz="1300" dirty="0"/>
+            <a:endParaRPr lang="en-US" sz="1600" dirty="0"/>
           </a:p>
         </p:txBody>
       </p:sp>
@@ -2878,8 +2912,8 @@
         </p:nvSpPr>
         <p:spPr>
           <a:xfrm>
-            <a:off x="365760" y="3931920"/>
-            <a:ext cx="8412480" cy="1188720"/>
+            <a:off x="365760" y="4389120"/>
+            <a:ext cx="8412480" cy="914400"/>
           </a:xfrm>
           <a:prstGeom prst="rect">
             <a:avLst/>

--- a/lecture_pptx/out/s17/ワーク01.pptx
+++ b/lecture_pptx/out/s17/ワーク01.pptx
@@ -1551,7 +1551,7 @@
                 <a:ea typeface="Yu Gothic UI Semibold" pitchFamily="34" charset="-122"/>
                 <a:cs typeface="Yu Gothic UI Semibold" pitchFamily="34" charset="-120"/>
               </a:rPr>
-              <a:t>ライフプランAIヒアリング設計</a:t>
+              <a:t>ライフプランAIの 入出力を設計する</a:t>
             </a:r>
             <a:endParaRPr lang="en-US" sz="3800" dirty="0"/>
           </a:p>
@@ -1590,7 +1590,7 @@
                 <a:ea typeface="Yu Gothic UI" pitchFamily="34" charset="-122"/>
                 <a:cs typeface="Yu Gothic UI" pitchFamily="34" charset="-120"/>
               </a:rPr>
-              <a:t>聞き漏れゼロの30項目+数値化ロジックを設計</a:t>
+              <a:t>顧客カルテ(入力)+ 40年CF表・提案フック(出力)+ 前提テーブル の3点セットを固める</a:t>
             </a:r>
             <a:endParaRPr lang="en-US" sz="1900" dirty="0"/>
           </a:p>
@@ -1806,7 +1806,7 @@
                 <a:ea typeface="Yu Gothic UI Semibold" pitchFamily="34" charset="-122"/>
                 <a:cs typeface="Yu Gothic UI Semibold" pitchFamily="34" charset="-120"/>
               </a:rPr>
-              <a:t>ヒアリング30項目</a:t>
+              <a:t>入力: 顧客カルテを設計</a:t>
             </a:r>
             <a:endParaRPr lang="en-US" sz="1700" dirty="0"/>
           </a:p>
@@ -1845,7 +1845,7 @@
                 <a:ea typeface="Yu Gothic UI" pitchFamily="34" charset="-122"/>
                 <a:cs typeface="Yu Gothic UI" pitchFamily="34" charset="-120"/>
               </a:rPr>
-              <a:t>4カテゴリで漏れなくヒアリングする項目セット。</a:t>
+              <a:t>対面で埋めやすい、AIが計算できる 縦2列テンプレを作る</a:t>
             </a:r>
             <a:endParaRPr lang="en-US" sz="1300" dirty="0"/>
           </a:p>
@@ -1970,7 +1970,7 @@
                 <a:ea typeface="Yu Gothic UI Semibold" pitchFamily="34" charset="-122"/>
                 <a:cs typeface="Yu Gothic UI Semibold" pitchFamily="34" charset="-120"/>
               </a:rPr>
-              <a:t>数値化ロジック</a:t>
+              <a:t>出力: CF表 + サマリ + 提案フック</a:t>
             </a:r>
             <a:endParaRPr lang="en-US" sz="1700" dirty="0"/>
           </a:p>
@@ -2009,7 +2009,7 @@
                 <a:ea typeface="Yu Gothic UI" pitchFamily="34" charset="-122"/>
                 <a:cs typeface="Yu Gothic UI" pitchFamily="34" charset="-120"/>
               </a:rPr>
-              <a:t>感覚的な不安を金額で表す計算式を設計。</a:t>
+              <a:t>40年ぶんの年次CFと、代理店が使いやすい提案フックの形を決める</a:t>
             </a:r>
             <a:endParaRPr lang="en-US" sz="1300" dirty="0"/>
           </a:p>
@@ -2134,7 +2134,7 @@
                 <a:ea typeface="Yu Gothic UI Semibold" pitchFamily="34" charset="-122"/>
                 <a:cs typeface="Yu Gothic UI Semibold" pitchFamily="34" charset="-120"/>
               </a:rPr>
-              <a:t>既存シートの棚卸し</a:t>
+              <a:t>前提: 経済前提+教育費相場</a:t>
             </a:r>
             <a:endParaRPr lang="en-US" sz="1700" dirty="0"/>
           </a:p>
@@ -2173,7 +2173,7 @@
                 <a:ea typeface="Yu Gothic UI" pitchFamily="34" charset="-122"/>
                 <a:cs typeface="Yu Gothic UI" pitchFamily="34" charset="-120"/>
               </a:rPr>
-              <a:t>既存ヒアリングを 3軸の観点で改善。</a:t>
+              <a:t>顧客ごとに書き直さず、代理店で一元管理する前提テーブルを整備</a:t>
             </a:r>
             <a:endParaRPr lang="en-US" sz="1300" dirty="0"/>
           </a:p>
@@ -2372,7 +2372,7 @@
                 <a:ea typeface="Yu Gothic UI Semibold" pitchFamily="34" charset="-122"/>
                 <a:cs typeface="Yu Gothic UI Semibold" pitchFamily="34" charset="-120"/>
               </a:rPr>
-              <a:t>ライフプラン</a:t>
+              <a:t>ライフプランシミュレーション</a:t>
             </a:r>
             <a:endParaRPr lang="en-US" sz="1600" dirty="0"/>
           </a:p>
@@ -2414,7 +2414,7 @@
                 <a:ea typeface="Yu Gothic UI" pitchFamily="34" charset="-122"/>
                 <a:cs typeface="Yu Gothic UI" pitchFamily="34" charset="-120"/>
               </a:rPr>
-              <a:t>今後の人生でかかる費用とリスクを見える化した計画書。</a:t>
+              <a:t>相談時から40年ぶんの家計キャッシュフローを試算し、貯蓄推移とリスク箇所を可視化する分析。</a:t>
             </a:r>
             <a:endParaRPr lang="en-US" sz="1600" dirty="0"/>
           </a:p>
@@ -2522,7 +2522,7 @@
                 <a:ea typeface="Yu Gothic UI Semibold" pitchFamily="34" charset="-122"/>
                 <a:cs typeface="Yu Gothic UI Semibold" pitchFamily="34" charset="-120"/>
               </a:rPr>
-              <a:t>ヒアリング項目</a:t>
+              <a:t>顧客カルテ</a:t>
             </a:r>
             <a:endParaRPr lang="en-US" sz="1600" dirty="0"/>
           </a:p>
@@ -2564,7 +2564,7 @@
                 <a:ea typeface="Yu Gothic UI" pitchFamily="34" charset="-122"/>
                 <a:cs typeface="Yu Gothic UI" pitchFamily="34" charset="-120"/>
               </a:rPr>
-              <a:t>ライフプラン作成のために聞く質問群。</a:t>
+              <a:t>対面ヒアリングで埋める入力シート。</a:t>
             </a:r>
             <a:pPr indent="0" marL="0">
               <a:spcAft>
@@ -2581,7 +2581,7 @@
                 <a:ea typeface="Yu Gothic UI" pitchFamily="34" charset="-122"/>
                 <a:cs typeface="Yu Gothic UI" pitchFamily="34" charset="-120"/>
               </a:rPr>
-              <a:t>漏れると見直し不可。</a:t>
+              <a:t>項目/値の縦2列で AI に渡す構造化データ。</a:t>
             </a:r>
             <a:endParaRPr lang="en-US" sz="1600" dirty="0"/>
           </a:p>
@@ -2689,7 +2689,7 @@
                 <a:ea typeface="Yu Gothic UI Semibold" pitchFamily="34" charset="-122"/>
                 <a:cs typeface="Yu Gothic UI Semibold" pitchFamily="34" charset="-120"/>
               </a:rPr>
-              <a:t>数値化</a:t>
+              <a:t>前提テーブル</a:t>
             </a:r>
             <a:endParaRPr lang="en-US" sz="1600" dirty="0"/>
           </a:p>
@@ -2731,24 +2731,7 @@
                 <a:ea typeface="Yu Gothic UI" pitchFamily="34" charset="-122"/>
                 <a:cs typeface="Yu Gothic UI" pitchFamily="34" charset="-120"/>
               </a:rPr>
-              <a:t>「不安」を金額に変換すること。</a:t>
-            </a:r>
-            <a:pPr indent="0" marL="0">
-              <a:spcAft>
-                <a:spcPts val="600"/>
-              </a:spcAft>
-              <a:buNone/>
-            </a:pPr>
-            <a:r>
-              <a:rPr lang="en-US" sz="1600" dirty="0">
-                <a:solidFill>
-                  <a:srgbClr val="1A1A1A"/>
-                </a:solidFill>
-                <a:latin typeface="Yu Gothic UI" pitchFamily="34" charset="0"/>
-                <a:ea typeface="Yu Gothic UI" pitchFamily="34" charset="-122"/>
-                <a:cs typeface="Yu Gothic UI" pitchFamily="34" charset="-120"/>
-              </a:rPr>
-              <a:t>説得力UPの基本。</a:t>
+              <a:t>経済前提(物価/給与/リターン)や 教育費相場、公的年金額 を一元管理するテーブル。</a:t>
             </a:r>
             <a:endParaRPr lang="en-US" sz="1600" dirty="0"/>
           </a:p>
@@ -2856,7 +2839,7 @@
                 <a:ea typeface="Yu Gothic UI Semibold" pitchFamily="34" charset="-122"/>
                 <a:cs typeface="Yu Gothic UI Semibold" pitchFamily="34" charset="-120"/>
               </a:rPr>
-              <a:t>4カテゴリ</a:t>
+              <a:t>保険提案フック</a:t>
             </a:r>
             <a:endParaRPr lang="en-US" sz="1600" dirty="0"/>
           </a:p>
@@ -2898,7 +2881,7 @@
                 <a:ea typeface="Yu Gothic UI" pitchFamily="34" charset="-122"/>
                 <a:cs typeface="Yu Gothic UI" pitchFamily="34" charset="-120"/>
               </a:rPr>
-              <a:t>基本/家族/資産/不安 など、項目を分類する枠組み。</a:t>
+              <a:t>シミュレーション結果から浮かぶ "この時期・この商品タイプ" の提案候補。</a:t>
             </a:r>
             <a:endParaRPr lang="en-US" sz="1600" dirty="0"/>
           </a:p>
@@ -2951,7 +2934,7 @@
                 <a:ea typeface="Yu Gothic UI" pitchFamily="34" charset="-122"/>
                 <a:cs typeface="Yu Gothic UI" pitchFamily="34" charset="-120"/>
               </a:rPr>
-              <a:t>ライフプラン: </a:t>
+              <a:t>ライフプランシミュレーション: </a:t>
             </a:r>
             <a:pPr indent="0" marL="0">
               <a:buNone/>
@@ -2993,7 +2976,7 @@
                 <a:ea typeface="Yu Gothic UI" pitchFamily="34" charset="-122"/>
                 <a:cs typeface="Yu Gothic UI" pitchFamily="34" charset="-120"/>
               </a:rPr>
-              <a:t>ヒアリング項目: </a:t>
+              <a:t>顧客カルテ: </a:t>
             </a:r>
             <a:pPr indent="0" marL="0">
               <a:buNone/>
@@ -3007,7 +2990,7 @@
                 <a:ea typeface="Yu Gothic UI" pitchFamily="34" charset="-122"/>
                 <a:cs typeface="Yu Gothic UI" pitchFamily="34" charset="-120"/>
               </a:rPr>
-              <a:t>4カテゴリで整理   </a:t>
+              <a:t>数値は万円単位で統一   </a:t>
             </a:r>
             <a:pPr indent="0" marL="0">
               <a:buNone/>
@@ -3035,7 +3018,7 @@
                 <a:ea typeface="Yu Gothic UI" pitchFamily="34" charset="-122"/>
                 <a:cs typeface="Yu Gothic UI" pitchFamily="34" charset="-120"/>
               </a:rPr>
-              <a:t>数値化: </a:t>
+              <a:t>前提テーブル: </a:t>
             </a:r>
             <a:pPr indent="0" marL="0">
               <a:buNone/>
@@ -3049,7 +3032,7 @@
                 <a:ea typeface="Yu Gothic UI" pitchFamily="34" charset="-122"/>
                 <a:cs typeface="Yu Gothic UI" pitchFamily="34" charset="-120"/>
               </a:rPr>
-              <a:t>AI と相性が良い   </a:t>
+              <a:t>年1回見直し   </a:t>
             </a:r>
             <a:pPr indent="0" marL="0">
               <a:buNone/>
@@ -3077,7 +3060,7 @@
                 <a:ea typeface="Yu Gothic UI" pitchFamily="34" charset="-122"/>
                 <a:cs typeface="Yu Gothic UI" pitchFamily="34" charset="-120"/>
               </a:rPr>
-              <a:t>4カテゴリ: </a:t>
+              <a:t>保険提案フック: </a:t>
             </a:r>
             <a:pPr indent="0" marL="0">
               <a:buNone/>
@@ -3091,7 +3074,7 @@
                 <a:ea typeface="Yu Gothic UI" pitchFamily="34" charset="-122"/>
                 <a:cs typeface="Yu Gothic UI" pitchFamily="34" charset="-120"/>
               </a:rPr>
-              <a:t>聞きやすさが上がる</a:t>
+              <a:t>第15回マスタ表と接続可能</a:t>
             </a:r>
             <a:endParaRPr lang="en-US" sz="1100" dirty="0"/>
           </a:p>
@@ -3182,7 +3165,7 @@
                 <a:ea typeface="Yu Gothic UI Semibold" pitchFamily="34" charset="-122"/>
                 <a:cs typeface="Yu Gothic UI Semibold" pitchFamily="34" charset="-120"/>
               </a:rPr>
-              <a:t>演習1 ヒアリング項目を AI と整理</a:t>
+              <a:t>演習1 顧客カルテ(入力)と前提テーブルを設計</a:t>
             </a:r>
             <a:endParaRPr lang="en-US" sz="2600" dirty="0"/>
           </a:p>
@@ -3310,7 +3293,47 @@
                 <a:ea typeface="Yu Gothic UI" pitchFamily="34" charset="-122"/>
                 <a:cs typeface="Yu Gothic UI" pitchFamily="34" charset="-120"/>
               </a:rPr>
-              <a:t>ヒアリングが属人化。新人や代理対応で漏れがある。30項目セットを作る。</a:t>
+              <a:t>既存ヒアリングは 対面で聞くだけの メモ形式で、AIに投げても計算できない。</a:t>
+            </a:r>
+            <a:endParaRPr lang="en-US" sz="1400" dirty="0"/>
+          </a:p>
+          <a:p>
+            <a:pPr indent="0" marL="0">
+              <a:spcAft>
+                <a:spcPts val="400"/>
+              </a:spcAft>
+              <a:buNone/>
+            </a:pPr>
+            <a:r>
+              <a:rPr lang="en-US" sz="1400" dirty="0">
+                <a:solidFill>
+                  <a:srgbClr val="1A1A1A"/>
+                </a:solidFill>
+                <a:latin typeface="Yu Gothic UI" pitchFamily="34" charset="0"/>
+                <a:ea typeface="Yu Gothic UI" pitchFamily="34" charset="-122"/>
+                <a:cs typeface="Yu Gothic UI" pitchFamily="34" charset="-120"/>
+              </a:rPr>
+              <a:t>AI が読める "項目/値" の縦テンプレに書き直し、加えて 全顧客で共通の "前提テーブル" を分離する。</a:t>
+            </a:r>
+            <a:endParaRPr lang="en-US" sz="1400" dirty="0"/>
+          </a:p>
+          <a:p>
+            <a:pPr indent="0" marL="0">
+              <a:spcAft>
+                <a:spcPts val="400"/>
+              </a:spcAft>
+              <a:buNone/>
+            </a:pPr>
+            <a:r>
+              <a:rPr lang="en-US" sz="1400" dirty="0">
+                <a:solidFill>
+                  <a:srgbClr val="1A1A1A"/>
+                </a:solidFill>
+                <a:latin typeface="Yu Gothic UI" pitchFamily="34" charset="0"/>
+                <a:ea typeface="Yu Gothic UI" pitchFamily="34" charset="-122"/>
+                <a:cs typeface="Yu Gothic UI" pitchFamily="34" charset="-120"/>
+              </a:rPr>
+              <a:t>同梱の「顧客カルテ_記入例」「前提テーブル」で完成イメージを掴む。</a:t>
             </a:r>
             <a:endParaRPr lang="en-US" sz="1400" dirty="0"/>
           </a:p>
@@ -3439,7 +3462,7 @@
                 <a:ea typeface="Yu Gothic UI" pitchFamily="34" charset="-122"/>
                 <a:cs typeface="Yu Gothic UI" pitchFamily="34" charset="-120"/>
               </a:rPr>
-              <a:t>Gemini に「ライフプランヒアリング30項目を4カテゴリで」依頼</a:t>
+              <a:t>「30項目ヒアリング」から必要な数値項目だけ抽出、自由記述は "リスク" "要望" の2欄に集約</a:t>
             </a:r>
             <a:endParaRPr lang="en-US" sz="1400" dirty="0"/>
           </a:p>
@@ -3460,7 +3483,7 @@
                 <a:ea typeface="Yu Gothic UI" pitchFamily="34" charset="-122"/>
                 <a:cs typeface="Yu Gothic UI" pitchFamily="34" charset="-120"/>
               </a:rPr>
-              <a:t>社内ルールと照合</a:t>
+              <a:t>子どもは 3人まで想定(空欄OK)、進学予定は "公立/私立" の組合せで書く</a:t>
             </a:r>
             <a:endParaRPr lang="en-US" sz="1400" dirty="0"/>
           </a:p>
@@ -3481,7 +3504,7 @@
                 <a:ea typeface="Yu Gothic UI" pitchFamily="34" charset="-122"/>
                 <a:cs typeface="Yu Gothic UI" pitchFamily="34" charset="-120"/>
               </a:rPr>
-              <a:t>質問の順番(聞きやすい順)も考慮</a:t>
+              <a:t>ライフイベントは 5件まで、退職金は 特別支出のマイナス記入で表現</a:t>
             </a:r>
             <a:endParaRPr lang="en-US" sz="1400" dirty="0"/>
           </a:p>
@@ -3502,7 +3525,7 @@
                 <a:ea typeface="Yu Gothic UI" pitchFamily="34" charset="-122"/>
                 <a:cs typeface="Yu Gothic UI" pitchFamily="34" charset="-120"/>
               </a:rPr>
-              <a:t>対面で使えるサイズに</a:t>
+              <a:t>前提テーブルの数値は 出典付き(文科省/厚労省 等)で信頼度を上げる</a:t>
             </a:r>
             <a:endParaRPr lang="en-US" sz="1400" dirty="0"/>
           </a:p>
@@ -3631,7 +3654,7 @@
                 <a:ea typeface="Yu Gothic UI" pitchFamily="34" charset="-122"/>
                 <a:cs typeface="Yu Gothic UI" pitchFamily="34" charset="-120"/>
               </a:rPr>
-              <a:t>4カテゴリ(基本/家族/資産/不安)で30項目</a:t>
+              <a:t>スプシ「顧客カルテ」を開く(項目/値/単位 の縦3列)</a:t>
             </a:r>
             <a:endParaRPr lang="en-US" sz="1400" dirty="0"/>
           </a:p>
@@ -3652,7 +3675,7 @@
                 <a:ea typeface="Yu Gothic UI" pitchFamily="34" charset="-122"/>
                 <a:cs typeface="Yu Gothic UI" pitchFamily="34" charset="-120"/>
               </a:rPr>
-              <a:t>各項目: 1問1答形式</a:t>
+              <a:t>別シート「顧客カルテ_記入例」で完成イメージを掴む(35歳会社員 家族4人の例)</a:t>
             </a:r>
             <a:endParaRPr lang="en-US" sz="1400" dirty="0"/>
           </a:p>
@@ -3673,7 +3696,7 @@
                 <a:ea typeface="Yu Gothic UI" pitchFamily="34" charset="-122"/>
                 <a:cs typeface="Yu Gothic UI" pitchFamily="34" charset="-120"/>
               </a:rPr>
-              <a:t>法令上必要な項目を含める</a:t>
+              <a:t>6セクションを整理: 基本情報 / 配偶者 / 子ども / 資産 / 月次支出 / ライフイベント / リスク・要望</a:t>
             </a:r>
             <a:endParaRPr lang="en-US" sz="1400" dirty="0"/>
           </a:p>
@@ -3694,7 +3717,28 @@
                 <a:ea typeface="Yu Gothic UI" pitchFamily="34" charset="-122"/>
                 <a:cs typeface="Yu Gothic UI" pitchFamily="34" charset="-120"/>
               </a:rPr>
-              <a:t>スプシで運用版に整形</a:t>
+              <a:t>数値は 万円単位 に統一(AIが計算しやすい形に)</a:t>
+            </a:r>
+            <a:endParaRPr lang="en-US" sz="1400" dirty="0"/>
+          </a:p>
+          <a:p>
+            <a:pPr marL="342900" indent="-342900">
+              <a:spcAft>
+                <a:spcPts val="400"/>
+              </a:spcAft>
+              <a:buSzPct val="100000"/>
+              <a:buChar char="●"/>
+            </a:pPr>
+            <a:r>
+              <a:rPr lang="en-US" sz="1400" dirty="0">
+                <a:solidFill>
+                  <a:srgbClr val="1A1A1A"/>
+                </a:solidFill>
+                <a:latin typeface="Yu Gothic UI" pitchFamily="34" charset="0"/>
+                <a:ea typeface="Yu Gothic UI" pitchFamily="34" charset="-122"/>
+                <a:cs typeface="Yu Gothic UI" pitchFamily="34" charset="-120"/>
+              </a:rPr>
+              <a:t>前提テーブル(経済前提+教育費相場+公的年金)を眺めて年次見直しの担当を決める</a:t>
             </a:r>
             <a:endParaRPr lang="en-US" sz="1400" dirty="0"/>
           </a:p>
@@ -3785,7 +3829,7 @@
                 <a:ea typeface="Yu Gothic UI Semibold" pitchFamily="34" charset="-122"/>
                 <a:cs typeface="Yu Gothic UI Semibold" pitchFamily="34" charset="-120"/>
               </a:rPr>
-              <a:t>演習1 ヒアリング項目を AI と整理 — 観点別チェック</a:t>
+              <a:t>演習1 顧客カルテ(入力)と前提テーブルを設計 — 観点別チェック</a:t>
             </a:r>
             <a:endParaRPr lang="en-US" sz="2600" dirty="0"/>
           </a:p>
@@ -3949,7 +3993,7 @@
                 <a:ea typeface="Yu Gothic UI Semibold" pitchFamily="34" charset="-122"/>
                 <a:cs typeface="Yu Gothic UI Semibold" pitchFamily="34" charset="-120"/>
               </a:rPr>
-              <a:t>A. 網羅性</a:t>
+              <a:t>A. 入力の構造化</a:t>
             </a:r>
             <a:endParaRPr lang="en-US" sz="1500" dirty="0"/>
           </a:p>
@@ -4002,7 +4046,7 @@
                 <a:ea typeface="Yu Gothic UI" pitchFamily="34" charset="-122"/>
                 <a:cs typeface="Yu Gothic UI" pitchFamily="34" charset="-120"/>
               </a:rPr>
-              <a:t>4カテゴリで漏れがないか</a:t>
+              <a:t>項目/値の縦2列で書けているか、数値は全て万円単位に統一されているか</a:t>
             </a:r>
             <a:endParaRPr lang="en-US" sz="1300" dirty="0"/>
           </a:p>
@@ -4055,7 +4099,7 @@
                 <a:ea typeface="Yu Gothic UI" pitchFamily="34" charset="-122"/>
                 <a:cs typeface="Yu Gothic UI" pitchFamily="34" charset="-120"/>
               </a:rPr>
-              <a:t>実例の見直し3件で抜けチェック</a:t>
+              <a:t>AI に投げて "計算できる形" になっているかテスト送信で確認</a:t>
             </a:r>
             <a:endParaRPr lang="en-US" sz="1300" dirty="0"/>
           </a:p>
@@ -4180,7 +4224,7 @@
                 <a:ea typeface="Yu Gothic UI Semibold" pitchFamily="34" charset="-122"/>
                 <a:cs typeface="Yu Gothic UI Semibold" pitchFamily="34" charset="-120"/>
               </a:rPr>
-              <a:t>B. 1問1答</a:t>
+              <a:t>B. 前提の分離</a:t>
             </a:r>
             <a:endParaRPr lang="en-US" sz="1500" dirty="0"/>
           </a:p>
@@ -4233,7 +4277,7 @@
                 <a:ea typeface="Yu Gothic UI" pitchFamily="34" charset="-122"/>
                 <a:cs typeface="Yu Gothic UI" pitchFamily="34" charset="-120"/>
               </a:rPr>
-              <a:t>1項目で複数の答えを聞いていないか</a:t>
+              <a:t>顧客ごとに書き換える情報 と 全顧客共通の前提 が別シートに分かれているか</a:t>
             </a:r>
             <a:endParaRPr lang="en-US" sz="1300" dirty="0"/>
           </a:p>
@@ -4286,7 +4330,7 @@
                 <a:ea typeface="Yu Gothic UI" pitchFamily="34" charset="-122"/>
                 <a:cs typeface="Yu Gothic UI" pitchFamily="34" charset="-120"/>
               </a:rPr>
-              <a:t>「あなたの○○は?」の単一形式に</a:t>
+              <a:t>「顧客カルテに教育費相場を書き込む」ような設計になっていたら要見直し</a:t>
             </a:r>
             <a:endParaRPr lang="en-US" sz="1300" dirty="0"/>
           </a:p>
@@ -4411,7 +4455,7 @@
                 <a:ea typeface="Yu Gothic UI Semibold" pitchFamily="34" charset="-122"/>
                 <a:cs typeface="Yu Gothic UI Semibold" pitchFamily="34" charset="-120"/>
               </a:rPr>
-              <a:t>C. 聞きやすい順</a:t>
+              <a:t>C. 更新性</a:t>
             </a:r>
             <a:endParaRPr lang="en-US" sz="1500" dirty="0"/>
           </a:p>
@@ -4464,7 +4508,7 @@
                 <a:ea typeface="Yu Gothic UI" pitchFamily="34" charset="-122"/>
                 <a:cs typeface="Yu Gothic UI" pitchFamily="34" charset="-120"/>
               </a:rPr>
-              <a:t>冒頭が答えやすい質問か</a:t>
+              <a:t>前提テーブルは 誰が いつ 見直すかが決まっているか</a:t>
             </a:r>
             <a:endParaRPr lang="en-US" sz="1300" dirty="0"/>
           </a:p>
@@ -4517,7 +4561,7 @@
                 <a:ea typeface="Yu Gothic UI" pitchFamily="34" charset="-122"/>
                 <a:cs typeface="Yu Gothic UI" pitchFamily="34" charset="-120"/>
               </a:rPr>
-              <a:t>個人情報→家族→お金→不安 の順が無難</a:t>
+              <a:t>出典が書かれている行が多いほど 再検証しやすい</a:t>
             </a:r>
             <a:endParaRPr lang="en-US" sz="1300" dirty="0"/>
           </a:p>
@@ -4608,7 +4652,7 @@
                 <a:ea typeface="Yu Gothic UI Semibold" pitchFamily="34" charset="-122"/>
                 <a:cs typeface="Yu Gothic UI Semibold" pitchFamily="34" charset="-120"/>
               </a:rPr>
-              <a:t>演習2 数値化ロジック</a:t>
+              <a:t>演習2 出力(40年CF表 + サマリ + 保険提案フック)を設計</a:t>
             </a:r>
             <a:endParaRPr lang="en-US" sz="2600" dirty="0"/>
           </a:p>
@@ -4736,7 +4780,47 @@
                 <a:ea typeface="Yu Gothic UI" pitchFamily="34" charset="-122"/>
                 <a:cs typeface="Yu Gothic UI" pitchFamily="34" charset="-120"/>
               </a:rPr>
-              <a:t>ヒアリングしても、感覚的な不安を金額化できない。数値化ロジックを作る。</a:t>
+              <a:t>AI から何が返ってきたら "代理店が顧客に見せられる状態" か を設計する。</a:t>
+            </a:r>
+            <a:endParaRPr lang="en-US" sz="1400" dirty="0"/>
+          </a:p>
+          <a:p>
+            <a:pPr indent="0" marL="0">
+              <a:spcAft>
+                <a:spcPts val="400"/>
+              </a:spcAft>
+              <a:buNone/>
+            </a:pPr>
+            <a:r>
+              <a:rPr lang="en-US" sz="1400" dirty="0">
+                <a:solidFill>
+                  <a:srgbClr val="1A1A1A"/>
+                </a:solidFill>
+                <a:latin typeface="Yu Gothic UI" pitchFamily="34" charset="0"/>
+                <a:ea typeface="Yu Gothic UI" pitchFamily="34" charset="-122"/>
+                <a:cs typeface="Yu Gothic UI" pitchFamily="34" charset="-120"/>
+              </a:rPr>
+              <a:t>同梱の「出力設計」シート と「シミュレーション結果_サンプル」で 完成イメージを確認、</a:t>
+            </a:r>
+            <a:endParaRPr lang="en-US" sz="1400" dirty="0"/>
+          </a:p>
+          <a:p>
+            <a:pPr indent="0" marL="0">
+              <a:spcAft>
+                <a:spcPts val="400"/>
+              </a:spcAft>
+              <a:buNone/>
+            </a:pPr>
+            <a:r>
+              <a:rPr lang="en-US" sz="1400" dirty="0">
+                <a:solidFill>
+                  <a:srgbClr val="1A1A1A"/>
+                </a:solidFill>
+                <a:latin typeface="Yu Gothic UI" pitchFamily="34" charset="0"/>
+                <a:ea typeface="Yu Gothic UI" pitchFamily="34" charset="-122"/>
+                <a:cs typeface="Yu Gothic UI" pitchFamily="34" charset="-120"/>
+              </a:rPr>
+              <a:t>自分の代理店で使う場合の 列項目・粒度 を検討する。</a:t>
             </a:r>
             <a:endParaRPr lang="en-US" sz="1400" dirty="0"/>
           </a:p>
@@ -4865,7 +4949,7 @@
                 <a:ea typeface="Yu Gothic UI" pitchFamily="34" charset="-122"/>
                 <a:cs typeface="Yu Gothic UI" pitchFamily="34" charset="-120"/>
               </a:rPr>
-              <a:t>Gemini に「不足額の計算ロジック作成」依頼</a:t>
+              <a:t>出力を決めることで W02 の実装が具体化する — "何を作るか" が明確に</a:t>
             </a:r>
             <a:endParaRPr lang="en-US" sz="1400" dirty="0"/>
           </a:p>
@@ -4886,7 +4970,7 @@
                 <a:ea typeface="Yu Gothic UI" pitchFamily="34" charset="-122"/>
                 <a:cs typeface="Yu Gothic UI" pitchFamily="34" charset="-120"/>
               </a:rPr>
-              <a:t>一般的な前提(年金月額/学費平均 等)</a:t>
+              <a:t>サマリの総評コメントは 3〜5文、代理店が顧客に説明できるトーンで</a:t>
             </a:r>
             <a:endParaRPr lang="en-US" sz="1400" dirty="0"/>
           </a:p>
@@ -4907,7 +4991,7 @@
                 <a:ea typeface="Yu Gothic UI" pitchFamily="34" charset="-122"/>
                 <a:cs typeface="Yu Gothic UI" pitchFamily="34" charset="-120"/>
               </a:rPr>
-              <a:t>計算式は Excel 関数で再現可能に</a:t>
+              <a:t>保険提案フックは "きっかけ" — 最終商品選定は 代理店 + 第15回マスタ表 が行う</a:t>
             </a:r>
             <a:endParaRPr lang="en-US" sz="1400" dirty="0"/>
           </a:p>
@@ -4928,7 +5012,7 @@
                 <a:ea typeface="Yu Gothic UI" pitchFamily="34" charset="-122"/>
                 <a:cs typeface="Yu Gothic UI" pitchFamily="34" charset="-120"/>
               </a:rPr>
-              <a:t>結果は赤/黄/緑 信号で見せる</a:t>
+              <a:t>40年は長い、30年に短縮する選択肢もある(ケース次第で講師が指示)</a:t>
             </a:r>
             <a:endParaRPr lang="en-US" sz="1400" dirty="0"/>
           </a:p>
@@ -5057,7 +5141,7 @@
                 <a:ea typeface="Yu Gothic UI" pitchFamily="34" charset="-122"/>
                 <a:cs typeface="Yu Gothic UI" pitchFamily="34" charset="-120"/>
               </a:rPr>
-              <a:t>教育/老後/医療 の3カテゴリで不足額計算式</a:t>
+              <a:t>出力① 40年CF表: 年/年齢/収入/支出/特別/収支/貯蓄残高/備考 の8列</a:t>
             </a:r>
             <a:endParaRPr lang="en-US" sz="1400" dirty="0"/>
           </a:p>
@@ -5078,7 +5162,7 @@
                 <a:ea typeface="Yu Gothic UI" pitchFamily="34" charset="-122"/>
                 <a:cs typeface="Yu Gothic UI" pitchFamily="34" charset="-120"/>
               </a:rPr>
-              <a:t>各カテゴリで前提条件を明示</a:t>
+              <a:t>出力② サマリ: 最大貯蓄年/最低貯蓄年/破綻年/リスク期間/総評コメント</a:t>
             </a:r>
             <a:endParaRPr lang="en-US" sz="1400" dirty="0"/>
           </a:p>
@@ -5099,7 +5183,7 @@
                 <a:ea typeface="Yu Gothic UI" pitchFamily="34" charset="-122"/>
                 <a:cs typeface="Yu Gothic UI" pitchFamily="34" charset="-120"/>
               </a:rPr>
-              <a:t>計算式は AI 出力をそのまま反映可能に</a:t>
+              <a:t>出力③ 保険提案フック: トリガー/推奨商品タイプ/推奨金額ヒント/提案理由 の4列で3〜5件</a:t>
             </a:r>
             <a:endParaRPr lang="en-US" sz="1400" dirty="0"/>
           </a:p>
@@ -5120,7 +5204,28 @@
                 <a:ea typeface="Yu Gothic UI" pitchFamily="34" charset="-122"/>
                 <a:cs typeface="Yu Gothic UI" pitchFamily="34" charset="-120"/>
               </a:rPr>
-              <a:t>ダミーデータで試算</a:t>
+              <a:t>色分けルール決定: 収支マイナス=赤、貯蓄200万以下=黄、貯蓄マイナス=濃赤</a:t>
+            </a:r>
+            <a:endParaRPr lang="en-US" sz="1400" dirty="0"/>
+          </a:p>
+          <a:p>
+            <a:pPr marL="342900" indent="-342900">
+              <a:spcAft>
+                <a:spcPts val="400"/>
+              </a:spcAft>
+              <a:buSzPct val="100000"/>
+              <a:buChar char="●"/>
+            </a:pPr>
+            <a:r>
+              <a:rPr lang="en-US" sz="1400" dirty="0">
+                <a:solidFill>
+                  <a:srgbClr val="1A1A1A"/>
+                </a:solidFill>
+                <a:latin typeface="Yu Gothic UI" pitchFamily="34" charset="0"/>
+                <a:ea typeface="Yu Gothic UI" pitchFamily="34" charset="-122"/>
+                <a:cs typeface="Yu Gothic UI" pitchFamily="34" charset="-120"/>
+              </a:rPr>
+              <a:t>第15回マスタ表(引受判定)との接続方法を検討: product_type からどう商品引き当てるか</a:t>
             </a:r>
             <a:endParaRPr lang="en-US" sz="1400" dirty="0"/>
           </a:p>
@@ -5211,7 +5316,7 @@
                 <a:ea typeface="Yu Gothic UI Semibold" pitchFamily="34" charset="-122"/>
                 <a:cs typeface="Yu Gothic UI Semibold" pitchFamily="34" charset="-120"/>
               </a:rPr>
-              <a:t>演習2 数値化ロジック — 観点別チェック</a:t>
+              <a:t>演習2 出力(40年CF表 + サマリ + 保険提案フック)を設計 — 観点別チェック</a:t>
             </a:r>
             <a:endParaRPr lang="en-US" sz="2600" dirty="0"/>
           </a:p>
@@ -5375,7 +5480,7 @@
                 <a:ea typeface="Yu Gothic UI Semibold" pitchFamily="34" charset="-122"/>
                 <a:cs typeface="Yu Gothic UI Semibold" pitchFamily="34" charset="-120"/>
               </a:rPr>
-              <a:t>A. 前提の明示</a:t>
+              <a:t>A. CF表の粒度</a:t>
             </a:r>
             <a:endParaRPr lang="en-US" sz="1500" dirty="0"/>
           </a:p>
@@ -5428,7 +5533,7 @@
                 <a:ea typeface="Yu Gothic UI" pitchFamily="34" charset="-122"/>
                 <a:cs typeface="Yu Gothic UI" pitchFamily="34" charset="-120"/>
               </a:rPr>
-              <a:t>計算前提が共有されているか</a:t>
+              <a:t>8列が顧客に見せられる粒度か、多すぎず少なすぎず</a:t>
             </a:r>
             <a:endParaRPr lang="en-US" sz="1300" dirty="0"/>
           </a:p>
@@ -5481,7 +5586,7 @@
                 <a:ea typeface="Yu Gothic UI" pitchFamily="34" charset="-122"/>
                 <a:cs typeface="Yu Gothic UI" pitchFamily="34" charset="-120"/>
               </a:rPr>
-              <a:t>前提を顧客に伝えて納得感を出す</a:t>
+              <a:t>実際に自社の面談資料と並べて "説明しやすさ" を確認</a:t>
             </a:r>
             <a:endParaRPr lang="en-US" sz="1300" dirty="0"/>
           </a:p>
@@ -5606,7 +5711,7 @@
                 <a:ea typeface="Yu Gothic UI Semibold" pitchFamily="34" charset="-122"/>
                 <a:cs typeface="Yu Gothic UI Semibold" pitchFamily="34" charset="-120"/>
               </a:rPr>
-              <a:t>B. 再現性</a:t>
+              <a:t>B. 提案フックの汎用性</a:t>
             </a:r>
             <a:endParaRPr lang="en-US" sz="1500" dirty="0"/>
           </a:p>
@@ -5659,7 +5764,7 @@
                 <a:ea typeface="Yu Gothic UI" pitchFamily="34" charset="-122"/>
                 <a:cs typeface="Yu Gothic UI" pitchFamily="34" charset="-120"/>
               </a:rPr>
-              <a:t>別の顧客でも同じロジックで計算できるか</a:t>
+              <a:t>product_type が汎用的(学資保険/個人年金/就業不能保険 等)になっているか</a:t>
             </a:r>
             <a:endParaRPr lang="en-US" sz="1300" dirty="0"/>
           </a:p>
@@ -5712,7 +5817,7 @@
                 <a:ea typeface="Yu Gothic UI" pitchFamily="34" charset="-122"/>
                 <a:cs typeface="Yu Gothic UI" pitchFamily="34" charset="-120"/>
               </a:rPr>
-              <a:t>関数化、変数だけ差し替え</a:t>
+              <a:t>特定商品名まで書かせると 第15回マスタ表との接続で二重管理になる</a:t>
             </a:r>
             <a:endParaRPr lang="en-US" sz="1300" dirty="0"/>
           </a:p>
@@ -5837,7 +5942,7 @@
                 <a:ea typeface="Yu Gothic UI Semibold" pitchFamily="34" charset="-122"/>
                 <a:cs typeface="Yu Gothic UI Semibold" pitchFamily="34" charset="-120"/>
               </a:rPr>
-              <a:t>C. 可視化</a:t>
+              <a:t>C. 破綻表現</a:t>
             </a:r>
             <a:endParaRPr lang="en-US" sz="1500" dirty="0"/>
           </a:p>
@@ -5890,7 +5995,7 @@
                 <a:ea typeface="Yu Gothic UI" pitchFamily="34" charset="-122"/>
                 <a:cs typeface="Yu Gothic UI" pitchFamily="34" charset="-120"/>
               </a:rPr>
-              <a:t>結果が直感的に理解できる形か</a:t>
+              <a:t>破綻年は "悪" ではなく "備えのきっかけ" として扱えているか</a:t>
             </a:r>
             <a:endParaRPr lang="en-US" sz="1300" dirty="0"/>
           </a:p>
@@ -5943,7 +6048,7 @@
                 <a:ea typeface="Yu Gothic UI" pitchFamily="34" charset="-122"/>
                 <a:cs typeface="Yu Gothic UI" pitchFamily="34" charset="-120"/>
               </a:rPr>
-              <a:t>色信号/グラフで一目で</a:t>
+              <a:t>総評コメントで "この対策で回避可能" までAIに書かせる設計にしているか</a:t>
             </a:r>
             <a:endParaRPr lang="en-US" sz="1300" dirty="0"/>
           </a:p>
@@ -6139,7 +6244,7 @@
                 <a:ea typeface="Yu Gothic UI Semibold" pitchFamily="34" charset="-122"/>
                 <a:cs typeface="Yu Gothic UI Semibold" pitchFamily="34" charset="-120"/>
               </a:rPr>
-              <a:t>聞き漏れがゼロに</a:t>
+              <a:t>入力・前提・出力の3点セット</a:t>
             </a:r>
             <a:endParaRPr lang="en-US" sz="1800" dirty="0"/>
           </a:p>
@@ -6178,7 +6283,7 @@
                 <a:ea typeface="Yu Gothic UI" pitchFamily="34" charset="-122"/>
                 <a:cs typeface="Yu Gothic UI" pitchFamily="34" charset="-120"/>
               </a:rPr>
-              <a:t>30項目セットで誰でも同じ品質のヒアリング。</a:t>
+              <a:t>顧客カルテ / 前提テーブル / 出力設計 が固まった。W02 の実装はこれをそのまま形にするだけ。</a:t>
             </a:r>
             <a:endParaRPr lang="en-US" sz="1300" dirty="0"/>
           </a:p>
@@ -6283,7 +6388,7 @@
                 <a:ea typeface="Yu Gothic UI Semibold" pitchFamily="34" charset="-122"/>
                 <a:cs typeface="Yu Gothic UI Semibold" pitchFamily="34" charset="-120"/>
               </a:rPr>
-              <a:t>不安が金額になる</a:t>
+              <a:t>数値化と自由記述の役割分担</a:t>
             </a:r>
             <a:endParaRPr lang="en-US" sz="1800" dirty="0"/>
           </a:p>
@@ -6322,7 +6427,7 @@
                 <a:ea typeface="Yu Gothic UI" pitchFamily="34" charset="-122"/>
                 <a:cs typeface="Yu Gothic UI" pitchFamily="34" charset="-120"/>
               </a:rPr>
-              <a:t>数値化で説得力UP、提案の根拠が示せる。</a:t>
+              <a:t>数値は AI が計算、自由記述の "リスク・要望" は AI が提案フックに反映。</a:t>
             </a:r>
             <a:endParaRPr lang="en-US" sz="1300" dirty="0"/>
           </a:p>
@@ -6427,7 +6532,7 @@
                 <a:ea typeface="Yu Gothic UI Semibold" pitchFamily="34" charset="-122"/>
                 <a:cs typeface="Yu Gothic UI Semibold" pitchFamily="34" charset="-120"/>
               </a:rPr>
-              <a:t>次回はシミュレーション</a:t>
+              <a:t>次はGAS実装</a:t>
             </a:r>
             <a:endParaRPr lang="en-US" sz="1800" dirty="0"/>
           </a:p>
@@ -6466,7 +6571,7 @@
                 <a:ea typeface="Yu Gothic UI" pitchFamily="34" charset="-122"/>
                 <a:cs typeface="Yu Gothic UI" pitchFamily="34" charset="-120"/>
               </a:rPr>
-              <a:t>ヒアリング結果から将来推移を計算する。</a:t>
+              <a:t>W02 で Code_ライフプランAI.gs を書き、実際に 30秒で40年CFが出るツールを作る。</a:t>
             </a:r>
             <a:endParaRPr lang="en-US" sz="1300" dirty="0"/>
           </a:p>
